--- a/output/skyrizi_ibd_split/deck.pptx
+++ b/output/skyrizi_ibd_split/deck.pptx
@@ -142,9 +142,9 @@
           </c:marker>
           <c:cat>
             <c:strRef>
-              <c:f>Sheet1!$A$2:$A$107</c:f>
+              <c:f>Sheet1!$A$2:$A$111</c:f>
               <c:strCache>
-                <c:ptCount val="106"/>
+                <c:ptCount val="110"/>
                 <c:pt idx="0">
                   <c:v>05-03</c:v>
                 </c:pt>
@@ -462,16 +462,28 @@
                 </c:pt>
                 <c:pt idx="105">
                   <c:v>05-08</c:v>
+                </c:pt>
+                <c:pt idx="106">
+                  <c:v>05-15</c:v>
+                </c:pt>
+                <c:pt idx="107">
+                  <c:v>05-22</c:v>
+                </c:pt>
+                <c:pt idx="108">
+                  <c:v>05-29</c:v>
+                </c:pt>
+                <c:pt idx="109">
+                  <c:v>06-05</c:v>
                 </c:pt>
               </c:strCache>
             </c:strRef>
           </c:cat>
           <c:val>
             <c:numRef>
-              <c:f>Sheet1!$B$2:$B$107</c:f>
+              <c:f>Sheet1!$B$2:$B$111</c:f>
               <c:numCache>
                 <c:formatCode>General</c:formatCode>
-                <c:ptCount val="106"/>
+                <c:ptCount val="110"/>
                 <c:pt idx="0">
                   <c:v>129.214948</c:v>
                 </c:pt>
@@ -789,6 +801,18 @@
                 </c:pt>
                 <c:pt idx="105">
                   <c:v>3621.582263</c:v>
+                </c:pt>
+                <c:pt idx="106">
+                  <c:v>3694.013908</c:v>
+                </c:pt>
+                <c:pt idx="107">
+                  <c:v>3767.894186</c:v>
+                </c:pt>
+                <c:pt idx="108">
+                  <c:v>3843.25207</c:v>
+                </c:pt>
+                <c:pt idx="109">
+                  <c:v>3920.117111</c:v>
                 </c:pt>
               </c:numCache>
             </c:numRef>
@@ -821,9 +845,9 @@
           </c:marker>
           <c:cat>
             <c:strRef>
-              <c:f>Sheet1!$A$2:$A$107</c:f>
+              <c:f>Sheet1!$A$2:$A$111</c:f>
               <c:strCache>
-                <c:ptCount val="106"/>
+                <c:ptCount val="110"/>
                 <c:pt idx="0">
                   <c:v>05-03</c:v>
                 </c:pt>
@@ -1141,16 +1165,28 @@
                 </c:pt>
                 <c:pt idx="105">
                   <c:v>05-08</c:v>
+                </c:pt>
+                <c:pt idx="106">
+                  <c:v>05-15</c:v>
+                </c:pt>
+                <c:pt idx="107">
+                  <c:v>05-22</c:v>
+                </c:pt>
+                <c:pt idx="108">
+                  <c:v>05-29</c:v>
+                </c:pt>
+                <c:pt idx="109">
+                  <c:v>06-05</c:v>
                 </c:pt>
               </c:strCache>
             </c:strRef>
           </c:cat>
           <c:val>
             <c:numRef>
-              <c:f>Sheet1!$C$2:$C$107</c:f>
+              <c:f>Sheet1!$C$2:$C$111</c:f>
               <c:numCache>
                 <c:formatCode>General</c:formatCode>
-                <c:ptCount val="106"/>
+                <c:ptCount val="110"/>
                 <c:pt idx="0">
                   <c:v>3526.895728</c:v>
                 </c:pt>
@@ -1468,6 +1504,18 @@
                 </c:pt>
                 <c:pt idx="105">
                   <c:v>12034.60115</c:v>
+                </c:pt>
+                <c:pt idx="106">
+                  <c:v>12275.293174</c:v>
+                </c:pt>
+                <c:pt idx="107">
+                  <c:v>12520.799037</c:v>
+                </c:pt>
+                <c:pt idx="108">
+                  <c:v>12771.215017</c:v>
+                </c:pt>
+                <c:pt idx="109">
+                  <c:v>13026.639318</c:v>
                 </c:pt>
               </c:numCache>
             </c:numRef>
@@ -1516,8 +1564,8 @@
         <c:lblAlgn val="ctr"/>
         <c:lblOffset val="100"/>
         <c:noMultiLvlLbl val="0"/>
-        <c:tickLblSkip val="11"/>
-        <c:tickMarkSkip val="11"/>
+        <c:tickLblSkip val="12"/>
+        <c:tickMarkSkip val="12"/>
       </c:catAx>
       <c:valAx>
         <c:axId val="2140495176"/>
@@ -4809,7 +4857,7 @@
                 </a:solidFill>
                 <a:latin typeface="Roboto"/>
               </a:rPr>
-              <a:t>Skyrizi's weekly IBD volume has scaled from ~3,656 to ~15,656 TRx since May 2024. Crohn's has led in every week; ulcerative colitis has grown from ~4% to ~23% of the mix since its 2024 launch.</a:t>
+              <a:t>Skyrizi's weekly IBD volume has scaled from ~3,656 to ~16,947 TRx since May 2024. Crohn's has led in every week; ulcerative colitis has grown from ~4% to ~23% of the mix since its 2024 launch.</a:t>
             </a:r>
           </a:p>
         </p:txBody>
@@ -4983,7 +5031,7 @@
                 </a:solidFill>
                 <a:latin typeface="Roboto"/>
               </a:rPr>
-              <a:t>CD ~12,035 vs UC ~3,622 TRx in the latest week (05-08) — about a 77/23 CD/UC split.</a:t>
+              <a:t>CD ~13,027 vs UC ~3,920 TRx in the latest week (06-05) — about a 77/23 CD/UC split.</a:t>
             </a:r>
           </a:p>
         </p:txBody>
@@ -5178,7 +5226,7 @@
                 </a:solidFill>
                 <a:latin typeface="Montserrat Medium"/>
               </a:rPr>
-              <a:t>~4x ramp</a:t>
+              <a:t>~5x ramp</a:t>
             </a:r>
           </a:p>
         </p:txBody>
@@ -5217,7 +5265,7 @@
                 </a:solidFill>
                 <a:latin typeface="Roboto"/>
               </a:rPr>
-              <a:t>Skyrizi's IBD volume rose from ~3,656 to ~15,656 weekly TRx (OBI maintenance is ~99.9% of it).</a:t>
+              <a:t>Skyrizi's IBD volume rose from ~3,656 to ~16,947 weekly TRx (OBI maintenance is ~99.9% of it).</a:t>
             </a:r>
           </a:p>
         </p:txBody>

--- a/output/skyrizi_ibd_split/deck.pptx
+++ b/output/skyrizi_ibd_split/deck.pptx
@@ -142,9 +142,9 @@
           </c:marker>
           <c:cat>
             <c:strRef>
-              <c:f>Sheet1!$A$2:$A$111</c:f>
+              <c:f>Sheet1!$A$2:$A$127</c:f>
               <c:strCache>
-                <c:ptCount val="110"/>
+                <c:ptCount val="126"/>
                 <c:pt idx="0">
                   <c:v>05-03</c:v>
                 </c:pt>
@@ -474,345 +474,441 @@
                 </c:pt>
                 <c:pt idx="109">
                   <c:v>06-05</c:v>
+                </c:pt>
+                <c:pt idx="110">
+                  <c:v>06-12</c:v>
+                </c:pt>
+                <c:pt idx="111">
+                  <c:v>06-19</c:v>
+                </c:pt>
+                <c:pt idx="112">
+                  <c:v>06-26</c:v>
+                </c:pt>
+                <c:pt idx="113">
+                  <c:v>07-03</c:v>
+                </c:pt>
+                <c:pt idx="114">
+                  <c:v>07-10</c:v>
+                </c:pt>
+                <c:pt idx="115">
+                  <c:v>07-17</c:v>
+                </c:pt>
+                <c:pt idx="116">
+                  <c:v>07-24</c:v>
+                </c:pt>
+                <c:pt idx="117">
+                  <c:v>07-31</c:v>
+                </c:pt>
+                <c:pt idx="118">
+                  <c:v>08-07</c:v>
+                </c:pt>
+                <c:pt idx="119">
+                  <c:v>08-14</c:v>
+                </c:pt>
+                <c:pt idx="120">
+                  <c:v>08-21</c:v>
+                </c:pt>
+                <c:pt idx="121">
+                  <c:v>08-28</c:v>
+                </c:pt>
+                <c:pt idx="122">
+                  <c:v>09-04</c:v>
+                </c:pt>
+                <c:pt idx="123">
+                  <c:v>09-11</c:v>
+                </c:pt>
+                <c:pt idx="124">
+                  <c:v>09-18</c:v>
+                </c:pt>
+                <c:pt idx="125">
+                  <c:v>09-25</c:v>
                 </c:pt>
               </c:strCache>
             </c:strRef>
           </c:cat>
           <c:val>
             <c:numRef>
-              <c:f>Sheet1!$B$2:$B$111</c:f>
+              <c:f>Sheet1!$B$2:$B$127</c:f>
               <c:numCache>
                 <c:formatCode>General</c:formatCode>
-                <c:ptCount val="110"/>
+                <c:ptCount val="126"/>
                 <c:pt idx="0">
-                  <c:v>129.214948</c:v>
+                  <c:v>112.966665</c:v>
                 </c:pt>
                 <c:pt idx="1">
-                  <c:v>133.884311</c:v>
+                  <c:v>32.335343</c:v>
                 </c:pt>
                 <c:pt idx="2">
-                  <c:v>135.244828</c:v>
+                  <c:v>85.100546</c:v>
                 </c:pt>
                 <c:pt idx="3">
-                  <c:v>137.76811</c:v>
+                  <c:v>59.091808</c:v>
                 </c:pt>
                 <c:pt idx="4">
-                  <c:v>120.296826</c:v>
+                  <c:v>52.125788</c:v>
                 </c:pt>
                 <c:pt idx="5">
-                  <c:v>152.062837</c:v>
+                  <c:v>277.40765</c:v>
                 </c:pt>
                 <c:pt idx="6">
-                  <c:v>152.216347</c:v>
+                  <c:v>295.923928</c:v>
                 </c:pt>
                 <c:pt idx="7">
-                  <c:v>151.002229</c:v>
+                  <c:v>419.053358</c:v>
                 </c:pt>
                 <c:pt idx="8">
-                  <c:v>164.736286</c:v>
+                  <c:v>245.08902</c:v>
                 </c:pt>
                 <c:pt idx="9">
-                  <c:v>111.773016</c:v>
+                  <c:v>57.006091</c:v>
                 </c:pt>
                 <c:pt idx="10">
-                  <c:v>174.140079</c:v>
+                  <c:v>78.766984</c:v>
                 </c:pt>
                 <c:pt idx="11">
-                  <c:v>155.528904</c:v>
+                  <c:v>79.154889</c:v>
                 </c:pt>
                 <c:pt idx="12">
-                  <c:v>169.320108</c:v>
+                  <c:v>152.008806</c:v>
                 </c:pt>
                 <c:pt idx="13">
-                  <c:v>253.506474</c:v>
+                  <c:v>146.420684</c:v>
                 </c:pt>
                 <c:pt idx="14">
-                  <c:v>261.911951</c:v>
+                  <c:v>125.449878</c:v>
                 </c:pt>
                 <c:pt idx="15">
-                  <c:v>267.63878</c:v>
+                  <c:v>234.910846</c:v>
                 </c:pt>
                 <c:pt idx="16">
-                  <c:v>268.491224</c:v>
+                  <c:v>80.521737</c:v>
                 </c:pt>
                 <c:pt idx="17">
-                  <c:v>284.118487</c:v>
+                  <c:v>183.362329</c:v>
                 </c:pt>
                 <c:pt idx="18">
-                  <c:v>319.726648</c:v>
+                  <c:v>532.894184</c:v>
                 </c:pt>
                 <c:pt idx="19">
-                  <c:v>397.335316</c:v>
+                  <c:v>446.348391</c:v>
                 </c:pt>
                 <c:pt idx="20">
-                  <c:v>417.647718</c:v>
+                  <c:v>370.880913</c:v>
                 </c:pt>
                 <c:pt idx="21">
-                  <c:v>403.488534</c:v>
+                  <c:v>361.030267</c:v>
                 </c:pt>
                 <c:pt idx="22">
-                  <c:v>596.247129</c:v>
+                  <c:v>786.400814</c:v>
                 </c:pt>
                 <c:pt idx="23">
-                  <c:v>561.69728</c:v>
+                  <c:v>362.076798</c:v>
                 </c:pt>
                 <c:pt idx="24">
-                  <c:v>627.681274</c:v>
+                  <c:v>463.055442</c:v>
                 </c:pt>
                 <c:pt idx="25">
-                  <c:v>607.716578</c:v>
+                  <c:v>435.204952</c:v>
                 </c:pt>
                 <c:pt idx="26">
-                  <c:v>860.603556</c:v>
+                  <c:v>1188.546601</c:v>
                 </c:pt>
                 <c:pt idx="27">
-                  <c:v>851.395772</c:v>
+                  <c:v>2032.682157</c:v>
                 </c:pt>
                 <c:pt idx="28">
-                  <c:v>868.418388</c:v>
+                  <c:v>1459.296946</c:v>
                 </c:pt>
                 <c:pt idx="29">
-                  <c:v>897.889687</c:v>
+                  <c:v>1676.729392</c:v>
                 </c:pt>
                 <c:pt idx="30">
-                  <c:v>586.1334</c:v>
+                  <c:v>1236.241574</c:v>
                 </c:pt>
                 <c:pt idx="31">
-                  <c:v>1050.32965</c:v>
+                  <c:v>1372.33171</c:v>
                 </c:pt>
                 <c:pt idx="32">
-                  <c:v>1014.59217</c:v>
+                  <c:v>380.585935</c:v>
                 </c:pt>
                 <c:pt idx="33">
-                  <c:v>1064.678339</c:v>
+                  <c:v>1638.384062</c:v>
                 </c:pt>
                 <c:pt idx="34">
-                  <c:v>769.105326</c:v>
+                  <c:v>624.414594</c:v>
                 </c:pt>
                 <c:pt idx="35">
-                  <c:v>856.392993</c:v>
+                  <c:v>443.511856</c:v>
                 </c:pt>
                 <c:pt idx="36">
-                  <c:v>1084.134141</c:v>
+                  <c:v>1143.262837</c:v>
                 </c:pt>
                 <c:pt idx="37">
-                  <c:v>1145.463734</c:v>
+                  <c:v>1302.2038</c:v>
                 </c:pt>
                 <c:pt idx="38">
-                  <c:v>935.435258</c:v>
+                  <c:v>727.717077</c:v>
                 </c:pt>
                 <c:pt idx="39">
-                  <c:v>1238.567233</c:v>
+                  <c:v>1164.516564</c:v>
                 </c:pt>
                 <c:pt idx="40">
-                  <c:v>1355.034857</c:v>
+                  <c:v>1550.301595</c:v>
                 </c:pt>
                 <c:pt idx="41">
-                  <c:v>1245.116507</c:v>
+                  <c:v>1110.028747</c:v>
                 </c:pt>
                 <c:pt idx="42">
-                  <c:v>1216.418503</c:v>
+                  <c:v>2065.77788</c:v>
                 </c:pt>
                 <c:pt idx="43">
-                  <c:v>1369.620857</c:v>
+                  <c:v>973.275275</c:v>
                 </c:pt>
                 <c:pt idx="44">
-                  <c:v>1427.71873</c:v>
+                  <c:v>873.147318</c:v>
                 </c:pt>
                 <c:pt idx="45">
-                  <c:v>1376.462382</c:v>
+                  <c:v>659.854457</c:v>
                 </c:pt>
                 <c:pt idx="46">
-                  <c:v>1353.087925</c:v>
+                  <c:v>979.902722</c:v>
                 </c:pt>
                 <c:pt idx="47">
-                  <c:v>1522.051879</c:v>
+                  <c:v>1197.428509</c:v>
                 </c:pt>
                 <c:pt idx="48">
-                  <c:v>1380.399384</c:v>
+                  <c:v>1043.5351</c:v>
                 </c:pt>
                 <c:pt idx="49">
-                  <c:v>1586.186421</c:v>
+                  <c:v>1163.656937</c:v>
                 </c:pt>
                 <c:pt idx="50">
-                  <c:v>1567.812252</c:v>
+                  <c:v>1070.129168</c:v>
                 </c:pt>
                 <c:pt idx="51">
-                  <c:v>1604.473643</c:v>
+                  <c:v>941.501903</c:v>
                 </c:pt>
                 <c:pt idx="52">
-                  <c:v>1704.791694</c:v>
+                  <c:v>553.155476</c:v>
                 </c:pt>
                 <c:pt idx="53">
-                  <c:v>1745.905485</c:v>
+                  <c:v>989.607523</c:v>
                 </c:pt>
                 <c:pt idx="54">
-                  <c:v>1782.309285</c:v>
+                  <c:v>631.667603</c:v>
                 </c:pt>
                 <c:pt idx="55">
-                  <c:v>1890.210055</c:v>
+                  <c:v>827.289781</c:v>
                 </c:pt>
                 <c:pt idx="56">
-                  <c:v>1591.71931</c:v>
+                  <c:v>1703.245022</c:v>
                 </c:pt>
                 <c:pt idx="57">
-                  <c:v>1929.739714</c:v>
+                  <c:v>2460.869691</c:v>
                 </c:pt>
                 <c:pt idx="58">
-                  <c:v>1949.28744</c:v>
+                  <c:v>3013.926045</c:v>
                 </c:pt>
                 <c:pt idx="59">
-                  <c:v>1941.504621</c:v>
+                  <c:v>2238.580612</c:v>
                 </c:pt>
                 <c:pt idx="60">
-                  <c:v>2039.130131</c:v>
+                  <c:v>3906.69346</c:v>
                 </c:pt>
                 <c:pt idx="61">
-                  <c:v>1628.031478</c:v>
+                  <c:v>1370.558481</c:v>
                 </c:pt>
                 <c:pt idx="62">
-                  <c:v>2233.778209</c:v>
+                  <c:v>1327.758374</c:v>
                 </c:pt>
                 <c:pt idx="63">
-                  <c:v>2102.589246</c:v>
+                  <c:v>1265.404278</c:v>
                 </c:pt>
                 <c:pt idx="64">
-                  <c:v>2138.984805</c:v>
+                  <c:v>2593.302326</c:v>
                 </c:pt>
                 <c:pt idx="65">
-                  <c:v>2244.352536</c:v>
+                  <c:v>1529.65969</c:v>
                 </c:pt>
                 <c:pt idx="66">
-                  <c:v>2354.170308</c:v>
+                  <c:v>3311.774292</c:v>
                 </c:pt>
                 <c:pt idx="67">
-                  <c:v>2380.110075</c:v>
+                  <c:v>4308.513526</c:v>
                 </c:pt>
                 <c:pt idx="68">
-                  <c:v>2296.415292</c:v>
+                  <c:v>1187.04231</c:v>
                 </c:pt>
                 <c:pt idx="69">
-                  <c:v>2505.135867</c:v>
+                  <c:v>1637.580066</c:v>
                 </c:pt>
                 <c:pt idx="70">
-                  <c:v>1996.780461</c:v>
+                  <c:v>4270.289611</c:v>
                 </c:pt>
                 <c:pt idx="71">
-                  <c:v>2509.277255</c:v>
+                  <c:v>3811.35034</c:v>
                 </c:pt>
                 <c:pt idx="72">
-                  <c:v>2495.053599</c:v>
+                  <c:v>1709.00827</c:v>
                 </c:pt>
                 <c:pt idx="73">
-                  <c:v>2549.875713</c:v>
+                  <c:v>5179.801841</c:v>
                 </c:pt>
                 <c:pt idx="74">
-                  <c:v>2627.08752</c:v>
+                  <c:v>4094.482516</c:v>
                 </c:pt>
                 <c:pt idx="75">
-                  <c:v>2726.594833</c:v>
+                  <c:v>2534.837234</c:v>
                 </c:pt>
                 <c:pt idx="76">
-                  <c:v>2714.555239</c:v>
+                  <c:v>3813.16062</c:v>
                 </c:pt>
                 <c:pt idx="77">
-                  <c:v>2504.677666</c:v>
+                  <c:v>2384.158123</c:v>
                 </c:pt>
                 <c:pt idx="78">
-                  <c:v>2614.6983</c:v>
+                  <c:v>1345.923486</c:v>
                 </c:pt>
                 <c:pt idx="79">
-                  <c:v>2755.418273</c:v>
+                  <c:v>3109.836545</c:v>
                 </c:pt>
                 <c:pt idx="80">
-                  <c:v>2805.041457</c:v>
+                  <c:v>2960.204735</c:v>
                 </c:pt>
                 <c:pt idx="81">
-                  <c:v>2923.216842</c:v>
+                  <c:v>4581.215033</c:v>
                 </c:pt>
                 <c:pt idx="82">
-                  <c:v>1959.454075</c:v>
+                  <c:v>3320.435184</c:v>
                 </c:pt>
                 <c:pt idx="83">
-                  <c:v>3273.642856</c:v>
+                  <c:v>2683.140765</c:v>
                 </c:pt>
                 <c:pt idx="84">
-                  <c:v>3163.152057</c:v>
+                  <c:v>4094.254195</c:v>
                 </c:pt>
                 <c:pt idx="85">
-                  <c:v>3172.054543</c:v>
+                  <c:v>4408.953231</c:v>
                 </c:pt>
                 <c:pt idx="86">
-                  <c:v>2029.164421</c:v>
+                  <c:v>4772.048213</c:v>
                 </c:pt>
                 <c:pt idx="87">
-                  <c:v>2271.700805</c:v>
+                  <c:v>1587.262056</c:v>
                 </c:pt>
                 <c:pt idx="88">
-                  <c:v>3255.517144</c:v>
+                  <c:v>2215.455024</c:v>
                 </c:pt>
                 <c:pt idx="89">
-                  <c:v>3076.766229</c:v>
+                  <c:v>2654.024268</c:v>
                 </c:pt>
                 <c:pt idx="90">
-                  <c:v>2525.336242</c:v>
+                  <c:v>2029.435048</c:v>
                 </c:pt>
                 <c:pt idx="91">
-                  <c:v>2525.086227</c:v>
+                  <c:v>2386.938326</c:v>
                 </c:pt>
                 <c:pt idx="92">
-                  <c:v>3316.063546</c:v>
+                  <c:v>3421.207844</c:v>
                 </c:pt>
                 <c:pt idx="93">
-                  <c:v>3101.782118</c:v>
+                  <c:v>2676.163899</c:v>
                 </c:pt>
                 <c:pt idx="94">
-                  <c:v>3000.136915</c:v>
+                  <c:v>2721.490945</c:v>
                 </c:pt>
                 <c:pt idx="95">
-                  <c:v>2974.262732</c:v>
+                  <c:v>3878.648139</c:v>
                 </c:pt>
                 <c:pt idx="96">
-                  <c:v>3242.186399</c:v>
+                  <c:v>1474.405274</c:v>
                 </c:pt>
                 <c:pt idx="97">
-                  <c:v>3128.526749</c:v>
+                  <c:v>2349.859565</c:v>
                 </c:pt>
                 <c:pt idx="98">
-                  <c:v>3058.346317</c:v>
+                  <c:v>1206.325847</c:v>
                 </c:pt>
                 <c:pt idx="99">
-                  <c:v>3258.957354</c:v>
+                  <c:v>2792.791802</c:v>
                 </c:pt>
                 <c:pt idx="100">
-                  <c:v>3328.79895</c:v>
+                  <c:v>6179.354879</c:v>
                 </c:pt>
                 <c:pt idx="101">
-                  <c:v>3210.787863</c:v>
+                  <c:v>4244.614389</c:v>
                 </c:pt>
                 <c:pt idx="102">
-                  <c:v>3009.430062</c:v>
+                  <c:v>2496.503139</c:v>
                 </c:pt>
                 <c:pt idx="103">
-                  <c:v>3148.8446</c:v>
+                  <c:v>6984.439705</c:v>
                 </c:pt>
                 <c:pt idx="104">
-                  <c:v>3426.530867</c:v>
+                  <c:v>2401.811024</c:v>
                 </c:pt>
                 <c:pt idx="105">
-                  <c:v>3621.582263</c:v>
+                  <c:v>2125.985736</c:v>
                 </c:pt>
                 <c:pt idx="106">
-                  <c:v>3694.013908</c:v>
+                  <c:v>3214.793242</c:v>
                 </c:pt>
                 <c:pt idx="107">
-                  <c:v>3767.894186</c:v>
+                  <c:v>1568.108767</c:v>
                 </c:pt>
                 <c:pt idx="108">
-                  <c:v>3843.25207</c:v>
+                  <c:v>1393.89105</c:v>
                 </c:pt>
                 <c:pt idx="109">
-                  <c:v>3920.117111</c:v>
+                  <c:v>5786.462639</c:v>
+                </c:pt>
+                <c:pt idx="110">
+                  <c:v>5167.619566</c:v>
+                </c:pt>
+                <c:pt idx="111">
+                  <c:v>2390.365386</c:v>
+                </c:pt>
+                <c:pt idx="112">
+                  <c:v>2928.661478</c:v>
+                </c:pt>
+                <c:pt idx="113">
+                  <c:v>7054.652757</c:v>
+                </c:pt>
+                <c:pt idx="114">
+                  <c:v>5397.906557</c:v>
+                </c:pt>
+                <c:pt idx="115">
+                  <c:v>5801.098724</c:v>
+                </c:pt>
+                <c:pt idx="116">
+                  <c:v>2981.598187</c:v>
+                </c:pt>
+                <c:pt idx="117">
+                  <c:v>4859.450523</c:v>
+                </c:pt>
+                <c:pt idx="118">
+                  <c:v>4292.286521</c:v>
+                </c:pt>
+                <c:pt idx="119">
+                  <c:v>6560.735205</c:v>
+                </c:pt>
+                <c:pt idx="120">
+                  <c:v>5620.045727</c:v>
+                </c:pt>
+                <c:pt idx="121">
+                  <c:v>6529.013147</c:v>
+                </c:pt>
+                <c:pt idx="122">
+                  <c:v>6659.59341</c:v>
+                </c:pt>
+                <c:pt idx="123">
+                  <c:v>6792.785278</c:v>
+                </c:pt>
+                <c:pt idx="124">
+                  <c:v>6928.640984</c:v>
+                </c:pt>
+                <c:pt idx="125">
+                  <c:v>7067.213803</c:v>
                 </c:pt>
               </c:numCache>
             </c:numRef>
@@ -845,9 +941,9 @@
           </c:marker>
           <c:cat>
             <c:strRef>
-              <c:f>Sheet1!$A$2:$A$111</c:f>
+              <c:f>Sheet1!$A$2:$A$127</c:f>
               <c:strCache>
-                <c:ptCount val="110"/>
+                <c:ptCount val="126"/>
                 <c:pt idx="0">
                   <c:v>05-03</c:v>
                 </c:pt>
@@ -1177,345 +1273,441 @@
                 </c:pt>
                 <c:pt idx="109">
                   <c:v>06-05</c:v>
+                </c:pt>
+                <c:pt idx="110">
+                  <c:v>06-12</c:v>
+                </c:pt>
+                <c:pt idx="111">
+                  <c:v>06-19</c:v>
+                </c:pt>
+                <c:pt idx="112">
+                  <c:v>06-26</c:v>
+                </c:pt>
+                <c:pt idx="113">
+                  <c:v>07-03</c:v>
+                </c:pt>
+                <c:pt idx="114">
+                  <c:v>07-10</c:v>
+                </c:pt>
+                <c:pt idx="115">
+                  <c:v>07-17</c:v>
+                </c:pt>
+                <c:pt idx="116">
+                  <c:v>07-24</c:v>
+                </c:pt>
+                <c:pt idx="117">
+                  <c:v>07-31</c:v>
+                </c:pt>
+                <c:pt idx="118">
+                  <c:v>08-07</c:v>
+                </c:pt>
+                <c:pt idx="119">
+                  <c:v>08-14</c:v>
+                </c:pt>
+                <c:pt idx="120">
+                  <c:v>08-21</c:v>
+                </c:pt>
+                <c:pt idx="121">
+                  <c:v>08-28</c:v>
+                </c:pt>
+                <c:pt idx="122">
+                  <c:v>09-04</c:v>
+                </c:pt>
+                <c:pt idx="123">
+                  <c:v>09-11</c:v>
+                </c:pt>
+                <c:pt idx="124">
+                  <c:v>09-18</c:v>
+                </c:pt>
+                <c:pt idx="125">
+                  <c:v>09-25</c:v>
                 </c:pt>
               </c:strCache>
             </c:strRef>
           </c:cat>
           <c:val>
             <c:numRef>
-              <c:f>Sheet1!$C$2:$C$111</c:f>
+              <c:f>Sheet1!$C$2:$C$127</c:f>
               <c:numCache>
                 <c:formatCode>General</c:formatCode>
-                <c:ptCount val="110"/>
+                <c:ptCount val="126"/>
                 <c:pt idx="0">
-                  <c:v>3526.895728</c:v>
+                  <c:v>5725.484189</c:v>
                 </c:pt>
                 <c:pt idx="1">
-                  <c:v>3654.345036</c:v>
+                  <c:v>1638.850675</c:v>
                 </c:pt>
                 <c:pt idx="2">
-                  <c:v>3691.480062</c:v>
+                  <c:v>4313.147015</c:v>
                 </c:pt>
                 <c:pt idx="3">
-                  <c:v>3760.35253</c:v>
+                  <c:v>2994.947359</c:v>
                 </c:pt>
                 <c:pt idx="4">
-                  <c:v>3283.477404</c:v>
+                  <c:v>2641.888853</c:v>
                 </c:pt>
                 <c:pt idx="5">
-                  <c:v>4054.470441</c:v>
+                  <c:v>4278.222576</c:v>
                 </c:pt>
                 <c:pt idx="6">
-                  <c:v>4058.563488</c:v>
+                  <c:v>4563.783406</c:v>
                 </c:pt>
                 <c:pt idx="7">
-                  <c:v>4026.1913</c:v>
+                  <c:v>6462.704019</c:v>
                 </c:pt>
                 <c:pt idx="8">
-                  <c:v>4392.384182</c:v>
+                  <c:v>3779.799789</c:v>
                 </c:pt>
                 <c:pt idx="9">
-                  <c:v>3001.495599</c:v>
+                  <c:v>2423.066339</c:v>
                 </c:pt>
                 <c:pt idx="10">
-                  <c:v>4676.268915</c:v>
+                  <c:v>3348.021665</c:v>
                 </c:pt>
                 <c:pt idx="11">
-                  <c:v>4176.4939</c:v>
+                  <c:v>3364.509729</c:v>
                 </c:pt>
                 <c:pt idx="12">
-                  <c:v>4546.835877</c:v>
+                  <c:v>6461.194162</c:v>
                 </c:pt>
                 <c:pt idx="13">
-                  <c:v>4242.977044</c:v>
+                  <c:v>3516.990097</c:v>
                 </c:pt>
                 <c:pt idx="14">
-                  <c:v>4383.660812</c:v>
+                  <c:v>3013.276317</c:v>
                 </c:pt>
                 <c:pt idx="15">
-                  <c:v>4479.511642</c:v>
+                  <c:v>5642.502797</c:v>
                 </c:pt>
                 <c:pt idx="16">
-                  <c:v>4493.779122</c:v>
+                  <c:v>1934.113035</c:v>
                 </c:pt>
                 <c:pt idx="17">
-                  <c:v>4755.335043</c:v>
+                  <c:v>4404.319644</c:v>
                 </c:pt>
                 <c:pt idx="18">
-                  <c:v>3857.25063</c:v>
+                  <c:v>4055.775243</c:v>
                 </c:pt>
                 <c:pt idx="19">
-                  <c:v>4793.538192</c:v>
+                  <c:v>3397.088594</c:v>
                 </c:pt>
                 <c:pt idx="20">
-                  <c:v>5038.591352</c:v>
+                  <c:v>2822.717287</c:v>
                 </c:pt>
                 <c:pt idx="21">
-                  <c:v>4867.771932</c:v>
+                  <c:v>2747.745541</c:v>
                 </c:pt>
                 <c:pt idx="22">
-                  <c:v>4730.946974</c:v>
+                  <c:v>5330.201404</c:v>
                 </c:pt>
                 <c:pt idx="23">
-                  <c:v>4456.809797</c:v>
+                  <c:v>2454.145801</c:v>
                 </c:pt>
                 <c:pt idx="24">
-                  <c:v>4980.362468</c:v>
+                  <c:v>3138.57606</c:v>
                 </c:pt>
                 <c:pt idx="25">
-                  <c:v>4821.951777</c:v>
+                  <c:v>2949.806263</c:v>
                 </c:pt>
                 <c:pt idx="26">
-                  <c:v>5381.880619</c:v>
+                  <c:v>3556.774953</c:v>
                 </c:pt>
                 <c:pt idx="27">
-                  <c:v>5324.298714</c:v>
+                  <c:v>6082.885584</c:v>
                 </c:pt>
                 <c:pt idx="28">
-                  <c:v>5430.751548</c:v>
+                  <c:v>4367.006579</c:v>
                 </c:pt>
                 <c:pt idx="29">
-                  <c:v>5615.053617</c:v>
+                  <c:v>5017.682184</c:v>
                 </c:pt>
                 <c:pt idx="30">
-                  <c:v>3665.450796</c:v>
+                  <c:v>3699.504136</c:v>
                 </c:pt>
                 <c:pt idx="31">
-                  <c:v>6245.61052</c:v>
+                  <c:v>8582.075203</c:v>
                 </c:pt>
                 <c:pt idx="32">
-                  <c:v>6033.10354</c:v>
+                  <c:v>2380.049294</c:v>
                 </c:pt>
                 <c:pt idx="33">
-                  <c:v>6330.932613</c:v>
+                  <c:v>10245.872135</c:v>
                 </c:pt>
                 <c:pt idx="34">
-                  <c:v>4573.356868</c:v>
+                  <c:v>3904.867144</c:v>
                 </c:pt>
                 <c:pt idx="35">
-                  <c:v>4599.737406</c:v>
+                  <c:v>2908.293893</c:v>
                 </c:pt>
                 <c:pt idx="36">
-                  <c:v>5822.948578</c:v>
+                  <c:v>7496.855571</c:v>
                 </c:pt>
                 <c:pt idx="37">
-                  <c:v>6152.353448</c:v>
+                  <c:v>8539.098356</c:v>
                 </c:pt>
                 <c:pt idx="38">
-                  <c:v>5024.278088</c:v>
+                  <c:v>4771.947138</c:v>
                 </c:pt>
                 <c:pt idx="39">
-                  <c:v>6652.417848</c:v>
+                  <c:v>7636.225203</c:v>
                 </c:pt>
                 <c:pt idx="40">
-                  <c:v>6691.228986</c:v>
+                  <c:v>7988.257875</c:v>
                 </c:pt>
                 <c:pt idx="41">
-                  <c:v>6148.446746</c:v>
+                  <c:v>5719.658623</c:v>
                 </c:pt>
                 <c:pt idx="42">
-                  <c:v>6006.73459</c:v>
+                  <c:v>10644.358797</c:v>
                 </c:pt>
                 <c:pt idx="43">
-                  <c:v>6763.255375</c:v>
+                  <c:v>5015.007344</c:v>
                 </c:pt>
                 <c:pt idx="44">
-                  <c:v>6866.716282</c:v>
+                  <c:v>7545.032961</c:v>
                 </c:pt>
                 <c:pt idx="45">
-                  <c:v>6620.195173</c:v>
+                  <c:v>5701.92856</c:v>
                 </c:pt>
                 <c:pt idx="46">
-                  <c:v>6507.774039</c:v>
+                  <c:v>8467.526824</c:v>
                 </c:pt>
                 <c:pt idx="47">
-                  <c:v>7320.418369</c:v>
+                  <c:v>10347.208751</c:v>
                 </c:pt>
                 <c:pt idx="48">
-                  <c:v>6380.341714</c:v>
+                  <c:v>5170.546016</c:v>
                 </c:pt>
                 <c:pt idx="49">
-                  <c:v>7331.509639</c:v>
+                  <c:v>5765.730103</c:v>
                 </c:pt>
                 <c:pt idx="50">
-                  <c:v>7246.582423</c:v>
+                  <c:v>5302.315279</c:v>
                 </c:pt>
                 <c:pt idx="51">
-                  <c:v>7416.034979</c:v>
+                  <c:v>4664.988187</c:v>
                 </c:pt>
                 <c:pt idx="52">
-                  <c:v>7248.794071</c:v>
+                  <c:v>3010.653671</c:v>
                 </c:pt>
                 <c:pt idx="53">
-                  <c:v>7423.610391</c:v>
+                  <c:v>5386.126775</c:v>
                 </c:pt>
                 <c:pt idx="54">
-                  <c:v>7578.399768</c:v>
+                  <c:v>3437.970825</c:v>
                 </c:pt>
                 <c:pt idx="55">
-                  <c:v>8037.195097</c:v>
+                  <c:v>4502.68166</c:v>
                 </c:pt>
                 <c:pt idx="56">
-                  <c:v>6768.008984</c:v>
+                  <c:v>9270.234315</c:v>
                 </c:pt>
                 <c:pt idx="57">
-                  <c:v>8219.325013</c:v>
+                  <c:v>8780.57779</c:v>
                 </c:pt>
                 <c:pt idx="58">
-                  <c:v>8302.584487</c:v>
+                  <c:v>10753.926626</c:v>
                 </c:pt>
                 <c:pt idx="59">
-                  <c:v>8269.435187</c:v>
+                  <c:v>7987.432765</c:v>
                 </c:pt>
                 <c:pt idx="60">
-                  <c:v>8685.250746</c:v>
+                  <c:v>13939.391409</c:v>
                 </c:pt>
                 <c:pt idx="61">
-                  <c:v>6315.817702</c:v>
+                  <c:v>6798.02834</c:v>
                 </c:pt>
                 <c:pt idx="62">
-                  <c:v>8665.763621</c:v>
+                  <c:v>6585.737993</c:v>
                 </c:pt>
                 <c:pt idx="63">
-                  <c:v>8156.826552</c:v>
+                  <c:v>6276.459022</c:v>
                 </c:pt>
                 <c:pt idx="64">
-                  <c:v>8298.020205</c:v>
+                  <c:v>12862.889803</c:v>
                 </c:pt>
                 <c:pt idx="65">
-                  <c:v>8479.06155</c:v>
+                  <c:v>4797.727224</c:v>
                 </c:pt>
                 <c:pt idx="66">
-                  <c:v>8893.948086</c:v>
+                  <c:v>10387.270964</c:v>
                 </c:pt>
                 <c:pt idx="67">
-                  <c:v>8991.947342</c:v>
+                  <c:v>13513.510736</c:v>
                 </c:pt>
                 <c:pt idx="68">
-                  <c:v>8675.75227</c:v>
+                  <c:v>3723.119101</c:v>
                 </c:pt>
                 <c:pt idx="69">
-                  <c:v>9464.289085</c:v>
+                  <c:v>5136.215929</c:v>
                 </c:pt>
                 <c:pt idx="70">
-                  <c:v>7247.464162</c:v>
+                  <c:v>10898.681507</c:v>
                 </c:pt>
                 <c:pt idx="71">
-                  <c:v>9107.609643</c:v>
+                  <c:v>9727.371501</c:v>
                 </c:pt>
                 <c:pt idx="72">
-                  <c:v>9055.983818</c:v>
+                  <c:v>4361.75026</c:v>
                 </c:pt>
                 <c:pt idx="73">
-                  <c:v>9254.964783</c:v>
+                  <c:v>13219.94892</c:v>
                 </c:pt>
                 <c:pt idx="74">
-                  <c:v>9295.265297</c:v>
+                  <c:v>13199.592546</c:v>
                 </c:pt>
                 <c:pt idx="75">
-                  <c:v>9647.346016</c:v>
+                  <c:v>8171.684339</c:v>
                 </c:pt>
                 <c:pt idx="76">
-                  <c:v>9604.747049</c:v>
+                  <c:v>12292.68077</c:v>
                 </c:pt>
                 <c:pt idx="77">
-                  <c:v>8862.149895</c:v>
+                  <c:v>7685.93239</c:v>
                 </c:pt>
                 <c:pt idx="78">
-                  <c:v>9251.429264</c:v>
+                  <c:v>4338.922328</c:v>
                 </c:pt>
                 <c:pt idx="79">
-                  <c:v>9934.066708</c:v>
+                  <c:v>7866.193476</c:v>
                 </c:pt>
                 <c:pt idx="80">
-                  <c:v>10112.972405</c:v>
+                  <c:v>7487.706454</c:v>
                 </c:pt>
                 <c:pt idx="81">
-                  <c:v>10539.028282</c:v>
+                  <c:v>11587.980037</c:v>
                 </c:pt>
                 <c:pt idx="82">
-                  <c:v>7064.389349</c:v>
+                  <c:v>8398.893383</c:v>
                 </c:pt>
                 <c:pt idx="83">
-                  <c:v>11282.887066</c:v>
+                  <c:v>4947.644431</c:v>
                 </c:pt>
                 <c:pt idx="84">
-                  <c:v>10902.071182</c:v>
+                  <c:v>7549.702287</c:v>
                 </c:pt>
                 <c:pt idx="85">
-                  <c:v>10932.754353</c:v>
+                  <c:v>8129.999435</c:v>
                 </c:pt>
                 <c:pt idx="86">
-                  <c:v>6993.686853</c:v>
+                  <c:v>8799.537496</c:v>
                 </c:pt>
                 <c:pt idx="87">
-                  <c:v>7948.157522</c:v>
+                  <c:v>7871.634947</c:v>
                 </c:pt>
                 <c:pt idx="88">
-                  <c:v>11390.304134</c:v>
+                  <c:v>10987.00314</c:v>
                 </c:pt>
                 <c:pt idx="89">
-                  <c:v>10764.895881</c:v>
+                  <c:v>13161.979207</c:v>
                 </c:pt>
                 <c:pt idx="90">
-                  <c:v>8835.569456</c:v>
+                  <c:v>10064.482916</c:v>
                 </c:pt>
                 <c:pt idx="91">
-                  <c:v>8834.694708</c:v>
+                  <c:v>11837.432307</c:v>
                 </c:pt>
                 <c:pt idx="92">
-                  <c:v>11053.950671</c:v>
+                  <c:v>14573.408499</c:v>
                 </c:pt>
                 <c:pt idx="93">
-                  <c:v>10339.653041</c:v>
+                  <c:v>11399.72533</c:v>
                 </c:pt>
                 <c:pt idx="94">
-                  <c:v>10000.823267</c:v>
+                  <c:v>11592.806132</c:v>
                 </c:pt>
                 <c:pt idx="95">
-                  <c:v>9914.572824</c:v>
+                  <c:v>16521.978884</c:v>
                 </c:pt>
                 <c:pt idx="96">
-                  <c:v>10716.333246</c:v>
+                  <c:v>8721.084718</c:v>
                 </c:pt>
                 <c:pt idx="97">
-                  <c:v>10340.656299</c:v>
+                  <c:v>13899.383505</c:v>
                 </c:pt>
                 <c:pt idx="98">
-                  <c:v>10108.690336</c:v>
+                  <c:v>7135.398996</c:v>
                 </c:pt>
                 <c:pt idx="99">
-                  <c:v>10771.765947</c:v>
+                  <c:v>16519.320933</c:v>
                 </c:pt>
                 <c:pt idx="100">
-                  <c:v>11061.675471</c:v>
+                  <c:v>11758.193583</c:v>
                 </c:pt>
                 <c:pt idx="101">
-                  <c:v>10669.521911</c:v>
+                  <c:v>8076.732708</c:v>
                 </c:pt>
                 <c:pt idx="102">
-                  <c:v>10000.405308</c:v>
+                  <c:v>4750.393489</c:v>
                 </c:pt>
                 <c:pt idx="103">
-                  <c:v>10463.683026</c:v>
+                  <c:v>13290.124248</c:v>
                 </c:pt>
                 <c:pt idx="104">
-                  <c:v>11386.440876</c:v>
+                  <c:v>14065.013933</c:v>
                 </c:pt>
                 <c:pt idx="105">
-                  <c:v>12034.60115</c:v>
+                  <c:v>12449.780061</c:v>
                 </c:pt>
                 <c:pt idx="106">
-                  <c:v>12275.293174</c:v>
+                  <c:v>18825.8407</c:v>
                 </c:pt>
                 <c:pt idx="107">
-                  <c:v>12520.799037</c:v>
+                  <c:v>9182.85054</c:v>
                 </c:pt>
                 <c:pt idx="108">
-                  <c:v>12771.215017</c:v>
+                  <c:v>8162.630966</c:v>
                 </c:pt>
                 <c:pt idx="109">
-                  <c:v>13026.639318</c:v>
+                  <c:v>15683.396122</c:v>
+                </c:pt>
+                <c:pt idx="110">
+                  <c:v>14006.10869</c:v>
+                </c:pt>
+                <c:pt idx="111">
+                  <c:v>6478.750415</c:v>
+                </c:pt>
+                <c:pt idx="112">
+                  <c:v>7937.72654</c:v>
+                </c:pt>
+                <c:pt idx="113">
+                  <c:v>12950.811543</c:v>
+                </c:pt>
+                <c:pt idx="114">
+                  <c:v>9909.385047</c:v>
+                </c:pt>
+                <c:pt idx="115">
+                  <c:v>10649.55837</c:v>
+                </c:pt>
+                <c:pt idx="116">
+                  <c:v>5473.56724</c:v>
+                </c:pt>
+                <c:pt idx="117">
+                  <c:v>8920.896618</c:v>
+                </c:pt>
+                <c:pt idx="118">
+                  <c:v>11184.611783</c:v>
+                </c:pt>
+                <c:pt idx="119">
+                  <c:v>17095.614638</c:v>
+                </c:pt>
+                <c:pt idx="120">
+                  <c:v>14644.416059</c:v>
+                </c:pt>
+                <c:pt idx="121">
+                  <c:v>17012.954987</c:v>
+                </c:pt>
+                <c:pt idx="122">
+                  <c:v>17353.214086</c:v>
+                </c:pt>
+                <c:pt idx="123">
+                  <c:v>17700.278368</c:v>
+                </c:pt>
+                <c:pt idx="124">
+                  <c:v>18054.283935</c:v>
+                </c:pt>
+                <c:pt idx="125">
+                  <c:v>18415.369614</c:v>
                 </c:pt>
               </c:numCache>
             </c:numRef>
@@ -1564,8 +1756,8 @@
         <c:lblAlgn val="ctr"/>
         <c:lblOffset val="100"/>
         <c:noMultiLvlLbl val="0"/>
-        <c:tickLblSkip val="12"/>
-        <c:tickMarkSkip val="12"/>
+        <c:tickLblSkip val="14"/>
+        <c:tickMarkSkip val="14"/>
       </c:catAx>
       <c:valAx>
         <c:axId val="2140495176"/>
@@ -4857,7 +5049,7 @@
                 </a:solidFill>
                 <a:latin typeface="Roboto"/>
               </a:rPr>
-              <a:t>Skyrizi's weekly IBD volume has scaled from ~3,656 to ~16,947 TRx since May 2024. Crohn's has led in every week; ulcerative colitis has grown from ~4% to ~23% of the mix since its 2024 launch.</a:t>
+              <a:t>Skyrizi's weekly IBD volume has scaled from ~5,838 to ~25,483 TRx since May 2024. Crohn's has led in every week; ulcerative colitis has grown from ~2% to ~28% of the mix since its 2024 launch.</a:t>
             </a:r>
           </a:p>
         </p:txBody>
@@ -5031,7 +5223,7 @@
                 </a:solidFill>
                 <a:latin typeface="Roboto"/>
               </a:rPr>
-              <a:t>CD ~13,027 vs UC ~3,920 TRx in the latest week (06-05) — about a 77/23 CD/UC split.</a:t>
+              <a:t>CD ~18,415 vs UC ~7,067 TRx in the latest week (09-25) — about a 72/28 CD/UC split.</a:t>
             </a:r>
           </a:p>
         </p:txBody>
@@ -5148,7 +5340,7 @@
                 </a:solidFill>
                 <a:latin typeface="Roboto"/>
               </a:rPr>
-              <a:t>Ulcerative colitis has risen from ~4% to ~23% of Skyrizi's IBD mix since its 2024 launch.</a:t>
+              <a:t>Ulcerative colitis has risen from ~2% to ~28% of Skyrizi's IBD mix since its 2024 launch.</a:t>
             </a:r>
           </a:p>
         </p:txBody>
@@ -5226,7 +5418,7 @@
                 </a:solidFill>
                 <a:latin typeface="Montserrat Medium"/>
               </a:rPr>
-              <a:t>~5x ramp</a:t>
+              <a:t>~4x ramp</a:t>
             </a:r>
           </a:p>
         </p:txBody>
@@ -5265,7 +5457,7 @@
                 </a:solidFill>
                 <a:latin typeface="Roboto"/>
               </a:rPr>
-              <a:t>Skyrizi's IBD volume rose from ~3,656 to ~16,947 weekly TRx (OBI maintenance is ~99.9% of it).</a:t>
+              <a:t>Skyrizi's IBD volume rose from ~5,838 to ~25,483 weekly TRx (OBI maintenance is ~99.9% of it).</a:t>
             </a:r>
           </a:p>
         </p:txBody>
@@ -5401,7 +5593,7 @@
                 </a:solidFill>
                 <a:latin typeface="Roboto"/>
               </a:rPr>
-              <a:t>Within Skyrizi's IBD business, Crohn's is the dominant indication (~77% of TRx) while ulcerative colitis is the faster-growing share since its 2024 launch.</a:t>
+              <a:t>Within Skyrizi's IBD business, Crohn's is the dominant indication (~72% of TRx) while ulcerative colitis is the faster-growing share since its 2024 launch.</a:t>
             </a:r>
           </a:p>
         </p:txBody>
